--- a/output/week9/Week9_Presentation_BICT3202_OOAD.pptx
+++ b/output/week9/Week9_Presentation_BICT3202_OOAD.pptx
@@ -5375,7 +5375,7 @@
                 </a:solidFill>
                 <a:latin typeface="Open Sans"/>
               </a:rPr>
-              <a:t>Inception → Elaboration → Construction → Transition</a:t>
+              <a:t>Inception -&gt; Elaboration -&gt; Construction -&gt; Transition</a:t>
             </a:r>
           </a:p>
         </p:txBody>
